--- a/pitch/GhostLine_Pitch_Deck.pptx
+++ b/pitch/GhostLine_Pitch_Deck.pptx
@@ -7478,33 +7478,224 @@
           </a:p>
         </p:txBody>
       </p:sp>
-      <p:pic>
-        <p:nvPicPr>
-          <p:cNvPr id="3" name="Picture 2" descr="closer_sphere.png"/>
-          <p:cNvPicPr>
-            <a:picLocks noChangeAspect="1"/>
-          </p:cNvPicPr>
-          <p:nvPr/>
-        </p:nvPicPr>
-        <p:blipFill>
-          <a:blip r:embed="rId2"/>
-          <a:stretch>
-            <a:fillRect/>
-          </a:stretch>
-        </p:blipFill>
-        <p:spPr>
-          <a:xfrm>
-            <a:off x="0" y="0"/>
-            <a:ext cx="12191695" cy="6858000"/>
-          </a:xfrm>
-          <a:prstGeom prst="rect">
-            <a:avLst/>
-          </a:prstGeom>
-        </p:spPr>
-      </p:pic>
-      <p:sp>
-        <p:nvSpPr>
-          <p:cNvPr id="4" name="TextBox 3"/>
+      <p:sp>
+        <p:nvSpPr>
+          <p:cNvPr id="3" name="Oval 2"/>
+          <p:cNvSpPr/>
+          <p:nvPr/>
+        </p:nvSpPr>
+        <p:spPr>
+          <a:xfrm>
+            <a:off x="4633264" y="1965960"/>
+            <a:ext cx="2926080" cy="2926080"/>
+          </a:xfrm>
+          <a:prstGeom prst="ellipse">
+            <a:avLst/>
+          </a:prstGeom>
+          <a:noFill/>
+          <a:ln w="9525">
+            <a:solidFill>
+              <a:srgbClr val="164A33"/>
+            </a:solidFill>
+          </a:ln>
+        </p:spPr>
+        <p:style>
+          <a:lnRef idx="1">
+            <a:schemeClr val="accent1"/>
+          </a:lnRef>
+          <a:fillRef idx="3">
+            <a:schemeClr val="accent1"/>
+          </a:fillRef>
+          <a:effectRef idx="2">
+            <a:schemeClr val="accent1"/>
+          </a:effectRef>
+          <a:fontRef idx="minor">
+            <a:schemeClr val="lt1"/>
+          </a:fontRef>
+        </p:style>
+        <p:txBody>
+          <a:bodyPr rtlCol="0" anchor="ctr"/>
+          <a:lstStyle/>
+          <a:p>
+            <a:pPr algn="ctr"/>
+          </a:p>
+        </p:txBody>
+      </p:sp>
+      <p:sp>
+        <p:nvSpPr>
+          <p:cNvPr id="4" name="Oval 3"/>
+          <p:cNvSpPr/>
+          <p:nvPr/>
+        </p:nvSpPr>
+        <p:spPr>
+          <a:xfrm>
+            <a:off x="3901744" y="1234440"/>
+            <a:ext cx="4389120" cy="4389120"/>
+          </a:xfrm>
+          <a:prstGeom prst="ellipse">
+            <a:avLst/>
+          </a:prstGeom>
+          <a:noFill/>
+          <a:ln w="9525">
+            <a:solidFill>
+              <a:srgbClr val="164A33"/>
+            </a:solidFill>
+          </a:ln>
+        </p:spPr>
+        <p:style>
+          <a:lnRef idx="1">
+            <a:schemeClr val="accent1"/>
+          </a:lnRef>
+          <a:fillRef idx="3">
+            <a:schemeClr val="accent1"/>
+          </a:fillRef>
+          <a:effectRef idx="2">
+            <a:schemeClr val="accent1"/>
+          </a:effectRef>
+          <a:fontRef idx="minor">
+            <a:schemeClr val="lt1"/>
+          </a:fontRef>
+        </p:style>
+        <p:txBody>
+          <a:bodyPr rtlCol="0" anchor="ctr"/>
+          <a:lstStyle/>
+          <a:p>
+            <a:pPr algn="ctr"/>
+          </a:p>
+        </p:txBody>
+      </p:sp>
+      <p:sp>
+        <p:nvSpPr>
+          <p:cNvPr id="5" name="Oval 4"/>
+          <p:cNvSpPr/>
+          <p:nvPr/>
+        </p:nvSpPr>
+        <p:spPr>
+          <a:xfrm>
+            <a:off x="3170224" y="502920"/>
+            <a:ext cx="5852160" cy="5852160"/>
+          </a:xfrm>
+          <a:prstGeom prst="ellipse">
+            <a:avLst/>
+          </a:prstGeom>
+          <a:noFill/>
+          <a:ln w="9525">
+            <a:solidFill>
+              <a:srgbClr val="164A33"/>
+            </a:solidFill>
+          </a:ln>
+        </p:spPr>
+        <p:style>
+          <a:lnRef idx="1">
+            <a:schemeClr val="accent1"/>
+          </a:lnRef>
+          <a:fillRef idx="3">
+            <a:schemeClr val="accent1"/>
+          </a:fillRef>
+          <a:effectRef idx="2">
+            <a:schemeClr val="accent1"/>
+          </a:effectRef>
+          <a:fontRef idx="minor">
+            <a:schemeClr val="lt1"/>
+          </a:fontRef>
+        </p:style>
+        <p:txBody>
+          <a:bodyPr rtlCol="0" anchor="ctr"/>
+          <a:lstStyle/>
+          <a:p>
+            <a:pPr algn="ctr"/>
+          </a:p>
+        </p:txBody>
+      </p:sp>
+      <p:sp>
+        <p:nvSpPr>
+          <p:cNvPr id="6" name="Oval 5"/>
+          <p:cNvSpPr/>
+          <p:nvPr/>
+        </p:nvSpPr>
+        <p:spPr>
+          <a:xfrm>
+            <a:off x="2438704" y="-228600"/>
+            <a:ext cx="7315200" cy="7315200"/>
+          </a:xfrm>
+          <a:prstGeom prst="ellipse">
+            <a:avLst/>
+          </a:prstGeom>
+          <a:noFill/>
+          <a:ln w="9525">
+            <a:solidFill>
+              <a:srgbClr val="164A33"/>
+            </a:solidFill>
+          </a:ln>
+        </p:spPr>
+        <p:style>
+          <a:lnRef idx="1">
+            <a:schemeClr val="accent1"/>
+          </a:lnRef>
+          <a:fillRef idx="3">
+            <a:schemeClr val="accent1"/>
+          </a:fillRef>
+          <a:effectRef idx="2">
+            <a:schemeClr val="accent1"/>
+          </a:effectRef>
+          <a:fontRef idx="minor">
+            <a:schemeClr val="lt1"/>
+          </a:fontRef>
+        </p:style>
+        <p:txBody>
+          <a:bodyPr rtlCol="0" anchor="ctr"/>
+          <a:lstStyle/>
+          <a:p>
+            <a:pPr algn="ctr"/>
+          </a:p>
+        </p:txBody>
+      </p:sp>
+      <p:sp>
+        <p:nvSpPr>
+          <p:cNvPr id="7" name="Oval 6"/>
+          <p:cNvSpPr/>
+          <p:nvPr/>
+        </p:nvSpPr>
+        <p:spPr>
+          <a:xfrm>
+            <a:off x="1707184" y="-960120"/>
+            <a:ext cx="8778240" cy="8778240"/>
+          </a:xfrm>
+          <a:prstGeom prst="ellipse">
+            <a:avLst/>
+          </a:prstGeom>
+          <a:noFill/>
+          <a:ln w="9525">
+            <a:solidFill>
+              <a:srgbClr val="164A33"/>
+            </a:solidFill>
+          </a:ln>
+        </p:spPr>
+        <p:style>
+          <a:lnRef idx="1">
+            <a:schemeClr val="accent1"/>
+          </a:lnRef>
+          <a:fillRef idx="3">
+            <a:schemeClr val="accent1"/>
+          </a:fillRef>
+          <a:effectRef idx="2">
+            <a:schemeClr val="accent1"/>
+          </a:effectRef>
+          <a:fontRef idx="minor">
+            <a:schemeClr val="lt1"/>
+          </a:fontRef>
+        </p:style>
+        <p:txBody>
+          <a:bodyPr rtlCol="0" anchor="ctr"/>
+          <a:lstStyle/>
+          <a:p>
+            <a:pPr algn="ctr"/>
+          </a:p>
+        </p:txBody>
+      </p:sp>
+      <p:sp>
+        <p:nvSpPr>
+          <p:cNvPr id="8" name="TextBox 7"/>
           <p:cNvSpPr txBox="1"/>
           <p:nvPr/>
         </p:nvSpPr>
@@ -7539,7 +7730,7 @@
       </p:sp>
       <p:sp>
         <p:nvSpPr>
-          <p:cNvPr id="5" name="TextBox 4"/>
+          <p:cNvPr id="9" name="TextBox 8"/>
           <p:cNvSpPr txBox="1"/>
           <p:nvPr/>
         </p:nvSpPr>
@@ -7574,7 +7765,7 @@
       </p:sp>
       <p:sp>
         <p:nvSpPr>
-          <p:cNvPr id="6" name="TextBox 5"/>
+          <p:cNvPr id="10" name="TextBox 9"/>
           <p:cNvSpPr txBox="1"/>
           <p:nvPr/>
         </p:nvSpPr>
@@ -7609,7 +7800,7 @@
       </p:sp>
       <p:sp>
         <p:nvSpPr>
-          <p:cNvPr id="7" name="TextBox 6"/>
+          <p:cNvPr id="11" name="TextBox 10"/>
           <p:cNvSpPr txBox="1"/>
           <p:nvPr/>
         </p:nvSpPr>
@@ -7644,7 +7835,7 @@
       </p:sp>
       <p:sp>
         <p:nvSpPr>
-          <p:cNvPr id="8" name="TextBox 7"/>
+          <p:cNvPr id="12" name="TextBox 11"/>
           <p:cNvSpPr txBox="1"/>
           <p:nvPr/>
         </p:nvSpPr>
@@ -7715,7 +7906,7 @@
       </p:sp>
       <p:sp>
         <p:nvSpPr>
-          <p:cNvPr id="9" name="TextBox 8"/>
+          <p:cNvPr id="13" name="TextBox 12"/>
           <p:cNvSpPr txBox="1"/>
           <p:nvPr/>
         </p:nvSpPr>
@@ -9731,23 +9922,23 @@
         </p:nvSpPr>
         <p:spPr>
           <a:xfrm>
-            <a:off x="6858000" y="914400"/>
-            <a:ext cx="4846320" cy="2377440"/>
-          </a:xfrm>
-          <a:prstGeom prst="rect">
-            <a:avLst/>
-          </a:prstGeom>
-          <a:noFill/>
-        </p:spPr>
-        <p:txBody>
-          <a:bodyPr wrap="square" lIns="0" rIns="0" tIns="0" bIns="0" anchor="t">
-            <a:spAutoFit/>
-          </a:bodyPr>
-          <a:lstStyle/>
-          <a:p>
-            <a:pPr algn="l"/>
-            <a:r>
-              <a:rPr sz="20000" b="0" i="0">
+            <a:off x="6858000" y="1005840"/>
+            <a:ext cx="3108960" cy="2194560"/>
+          </a:xfrm>
+          <a:prstGeom prst="rect">
+            <a:avLst/>
+          </a:prstGeom>
+          <a:noFill/>
+        </p:spPr>
+        <p:txBody>
+          <a:bodyPr wrap="square" lIns="0" rIns="0" tIns="0" bIns="0" anchor="t">
+            <a:spAutoFit/>
+          </a:bodyPr>
+          <a:lstStyle/>
+          <a:p>
+            <a:pPr algn="l"/>
+            <a:r>
+              <a:rPr sz="16000" b="0" i="0">
                 <a:solidFill>
                   <a:srgbClr val="E4ECF7"/>
                 </a:solidFill>
@@ -9755,8 +9946,34 @@
               </a:rPr>
               <a:t>94</a:t>
             </a:r>
-            <a:r>
-              <a:rPr sz="20000" b="0" i="0">
+          </a:p>
+        </p:txBody>
+      </p:sp>
+      <p:sp>
+        <p:nvSpPr>
+          <p:cNvPr id="9" name="TextBox 8"/>
+          <p:cNvSpPr txBox="1"/>
+          <p:nvPr/>
+        </p:nvSpPr>
+        <p:spPr>
+          <a:xfrm>
+            <a:off x="9692640" y="1005840"/>
+            <a:ext cx="2194560" cy="2194560"/>
+          </a:xfrm>
+          <a:prstGeom prst="rect">
+            <a:avLst/>
+          </a:prstGeom>
+          <a:noFill/>
+        </p:spPr>
+        <p:txBody>
+          <a:bodyPr wrap="square" lIns="0" rIns="0" tIns="0" bIns="0" anchor="t">
+            <a:spAutoFit/>
+          </a:bodyPr>
+          <a:lstStyle/>
+          <a:p>
+            <a:pPr algn="l"/>
+            <a:r>
+              <a:rPr sz="16000" b="0" i="0">
                 <a:solidFill>
                   <a:srgbClr val="3EE887"/>
                 </a:solidFill>
@@ -9769,14 +9986,14 @@
       </p:sp>
       <p:sp>
         <p:nvSpPr>
-          <p:cNvPr id="9" name="TextBox 8"/>
-          <p:cNvSpPr txBox="1"/>
-          <p:nvPr/>
-        </p:nvSpPr>
-        <p:spPr>
-          <a:xfrm>
-            <a:off x="6858000" y="3383280"/>
-            <a:ext cx="4572000" cy="365760"/>
+          <p:cNvPr id="10" name="TextBox 9"/>
+          <p:cNvSpPr txBox="1"/>
+          <p:nvPr/>
+        </p:nvSpPr>
+        <p:spPr>
+          <a:xfrm>
+            <a:off x="6858000" y="3246120"/>
+            <a:ext cx="5029200" cy="365760"/>
           </a:xfrm>
           <a:prstGeom prst="rect">
             <a:avLst/>
@@ -9804,29 +10021,29 @@
       </p:sp>
       <p:sp>
         <p:nvSpPr>
-          <p:cNvPr id="10" name="TextBox 9"/>
-          <p:cNvSpPr txBox="1"/>
-          <p:nvPr/>
-        </p:nvSpPr>
-        <p:spPr>
-          <a:xfrm>
-            <a:off x="6858000" y="3931920"/>
-            <a:ext cx="2286000" cy="1188720"/>
-          </a:xfrm>
-          <a:prstGeom prst="rect">
-            <a:avLst/>
-          </a:prstGeom>
-          <a:noFill/>
-        </p:spPr>
-        <p:txBody>
-          <a:bodyPr wrap="square" lIns="0" rIns="0" tIns="0" bIns="0" anchor="t">
-            <a:spAutoFit/>
-          </a:bodyPr>
-          <a:lstStyle/>
-          <a:p>
-            <a:pPr algn="l"/>
-            <a:r>
-              <a:rPr sz="6000" b="0" i="0">
+          <p:cNvPr id="11" name="TextBox 10"/>
+          <p:cNvSpPr txBox="1"/>
+          <p:nvPr/>
+        </p:nvSpPr>
+        <p:spPr>
+          <a:xfrm>
+            <a:off x="6858000" y="3840480"/>
+            <a:ext cx="2743200" cy="1097280"/>
+          </a:xfrm>
+          <a:prstGeom prst="rect">
+            <a:avLst/>
+          </a:prstGeom>
+          <a:noFill/>
+        </p:spPr>
+        <p:txBody>
+          <a:bodyPr wrap="square" lIns="0" rIns="0" tIns="0" bIns="0" anchor="t">
+            <a:spAutoFit/>
+          </a:bodyPr>
+          <a:lstStyle/>
+          <a:p>
+            <a:pPr algn="l"/>
+            <a:r>
+              <a:rPr sz="5000" b="0" i="0">
                 <a:solidFill>
                   <a:srgbClr val="E4ECF7"/>
                 </a:solidFill>
@@ -9835,7 +10052,7 @@
               <a:t>86.5</a:t>
             </a:r>
             <a:r>
-              <a:rPr sz="6000" b="0" i="0">
+              <a:rPr sz="5000" b="0" i="0">
                 <a:solidFill>
                   <a:srgbClr val="E4ECF7"/>
                 </a:solidFill>
@@ -9844,7 +10061,7 @@
               <a:t>–</a:t>
             </a:r>
             <a:r>
-              <a:rPr sz="6000" b="0" i="0">
+              <a:rPr sz="5000" b="0" i="0">
                 <a:solidFill>
                   <a:srgbClr val="E4ECF7"/>
                 </a:solidFill>
@@ -9853,7 +10070,7 @@
               <a:t>91.3</a:t>
             </a:r>
             <a:r>
-              <a:rPr sz="6000" b="0" i="0">
+              <a:rPr sz="5000" b="0" i="0">
                 <a:solidFill>
                   <a:srgbClr val="3EE887"/>
                 </a:solidFill>
@@ -9866,14 +10083,14 @@
       </p:sp>
       <p:sp>
         <p:nvSpPr>
-          <p:cNvPr id="11" name="TextBox 10"/>
-          <p:cNvSpPr txBox="1"/>
-          <p:nvPr/>
-        </p:nvSpPr>
-        <p:spPr>
-          <a:xfrm>
-            <a:off x="6858000" y="5120640"/>
-            <a:ext cx="2743200" cy="365760"/>
+          <p:cNvPr id="12" name="TextBox 11"/>
+          <p:cNvSpPr txBox="1"/>
+          <p:nvPr/>
+        </p:nvSpPr>
+        <p:spPr>
+          <a:xfrm>
+            <a:off x="6858000" y="4983480"/>
+            <a:ext cx="3200400" cy="365760"/>
           </a:xfrm>
           <a:prstGeom prst="rect">
             <a:avLst/>
@@ -9901,29 +10118,29 @@
       </p:sp>
       <p:sp>
         <p:nvSpPr>
-          <p:cNvPr id="12" name="TextBox 11"/>
-          <p:cNvSpPr txBox="1"/>
-          <p:nvPr/>
-        </p:nvSpPr>
-        <p:spPr>
-          <a:xfrm>
-            <a:off x="9509760" y="3931920"/>
-            <a:ext cx="2286000" cy="1188720"/>
-          </a:xfrm>
-          <a:prstGeom prst="rect">
-            <a:avLst/>
-          </a:prstGeom>
-          <a:noFill/>
-        </p:spPr>
-        <p:txBody>
-          <a:bodyPr wrap="square" lIns="0" rIns="0" tIns="0" bIns="0" anchor="t">
-            <a:spAutoFit/>
-          </a:bodyPr>
-          <a:lstStyle/>
-          <a:p>
-            <a:pPr algn="l"/>
-            <a:r>
-              <a:rPr sz="6000" b="0" i="0">
+          <p:cNvPr id="13" name="TextBox 12"/>
+          <p:cNvSpPr txBox="1"/>
+          <p:nvPr/>
+        </p:nvSpPr>
+        <p:spPr>
+          <a:xfrm>
+            <a:off x="9784080" y="3840480"/>
+            <a:ext cx="2286000" cy="1097280"/>
+          </a:xfrm>
+          <a:prstGeom prst="rect">
+            <a:avLst/>
+          </a:prstGeom>
+          <a:noFill/>
+        </p:spPr>
+        <p:txBody>
+          <a:bodyPr wrap="square" lIns="0" rIns="0" tIns="0" bIns="0" anchor="t">
+            <a:spAutoFit/>
+          </a:bodyPr>
+          <a:lstStyle/>
+          <a:p>
+            <a:pPr algn="l"/>
+            <a:r>
+              <a:rPr sz="5000" b="0" i="0">
                 <a:solidFill>
                   <a:srgbClr val="E4ECF7"/>
                 </a:solidFill>
@@ -9932,7 +10149,7 @@
               <a:t>85.0</a:t>
             </a:r>
             <a:r>
-              <a:rPr sz="6000" b="0" i="0">
+              <a:rPr sz="5000" b="0" i="0">
                 <a:solidFill>
                   <a:srgbClr val="3EE887"/>
                 </a:solidFill>
@@ -9945,14 +10162,14 @@
       </p:sp>
       <p:sp>
         <p:nvSpPr>
-          <p:cNvPr id="13" name="TextBox 12"/>
-          <p:cNvSpPr txBox="1"/>
-          <p:nvPr/>
-        </p:nvSpPr>
-        <p:spPr>
-          <a:xfrm>
-            <a:off x="9509760" y="5120640"/>
-            <a:ext cx="2743200" cy="365760"/>
+          <p:cNvPr id="14" name="TextBox 13"/>
+          <p:cNvSpPr txBox="1"/>
+          <p:nvPr/>
+        </p:nvSpPr>
+        <p:spPr>
+          <a:xfrm>
+            <a:off x="9784080" y="4983480"/>
+            <a:ext cx="2286000" cy="365760"/>
           </a:xfrm>
           <a:prstGeom prst="rect">
             <a:avLst/>

--- a/pitch/GhostLine_Pitch_Deck.pptx
+++ b/pitch/GhostLine_Pitch_Deck.pptx
@@ -8983,42 +8983,233 @@
           </a:p>
         </p:txBody>
       </p:sp>
-      <p:pic>
-        <p:nvPicPr>
-          <p:cNvPr id="7" name="Picture 6" descr="signatures_strip.png"/>
-          <p:cNvPicPr>
-            <a:picLocks noChangeAspect="1"/>
-          </p:cNvPicPr>
-          <p:nvPr/>
-        </p:nvPicPr>
-        <p:blipFill>
-          <a:blip r:embed="rId2"/>
-          <a:stretch>
-            <a:fillRect/>
-          </a:stretch>
-        </p:blipFill>
-        <p:spPr>
-          <a:xfrm>
-            <a:off x="548640" y="2194560"/>
-            <a:ext cx="11064240" cy="978408"/>
-          </a:xfrm>
-          <a:prstGeom prst="rect">
-            <a:avLst/>
-          </a:prstGeom>
-        </p:spPr>
-      </p:pic>
-      <p:sp>
-        <p:nvSpPr>
-          <p:cNvPr id="8" name="Rectangle 7"/>
+      <p:sp>
+        <p:nvSpPr>
+          <p:cNvPr id="7" name="Oval 6"/>
           <p:cNvSpPr/>
           <p:nvPr/>
         </p:nvSpPr>
         <p:spPr>
           <a:xfrm>
-            <a:off x="548640" y="3291840"/>
-            <a:ext cx="2121408" cy="27432"/>
-          </a:xfrm>
-          <a:prstGeom prst="rect">
+            <a:off x="1383822" y="2336836"/>
+            <a:ext cx="91440" cy="91440"/>
+          </a:xfrm>
+          <a:prstGeom prst="ellipse">
+            <a:avLst/>
+          </a:prstGeom>
+          <a:solidFill>
+            <a:srgbClr val="4DD9FF"/>
+          </a:solidFill>
+          <a:ln>
+            <a:noFill/>
+          </a:ln>
+        </p:spPr>
+        <p:style>
+          <a:lnRef idx="1">
+            <a:schemeClr val="accent1"/>
+          </a:lnRef>
+          <a:fillRef idx="3">
+            <a:schemeClr val="accent1"/>
+          </a:fillRef>
+          <a:effectRef idx="2">
+            <a:schemeClr val="accent1"/>
+          </a:effectRef>
+          <a:fontRef idx="minor">
+            <a:schemeClr val="lt1"/>
+          </a:fontRef>
+        </p:style>
+        <p:txBody>
+          <a:bodyPr rtlCol="0" anchor="ctr"/>
+          <a:lstStyle/>
+          <a:p>
+            <a:pPr algn="ctr"/>
+          </a:p>
+        </p:txBody>
+      </p:sp>
+      <p:sp>
+        <p:nvSpPr>
+          <p:cNvPr id="8" name="Oval 7"/>
+          <p:cNvSpPr/>
+          <p:nvPr/>
+        </p:nvSpPr>
+        <p:spPr>
+          <a:xfrm>
+            <a:off x="1816280" y="2300362"/>
+            <a:ext cx="64008" cy="64008"/>
+          </a:xfrm>
+          <a:prstGeom prst="ellipse">
+            <a:avLst/>
+          </a:prstGeom>
+          <a:solidFill>
+            <a:srgbClr val="4DD9FF"/>
+          </a:solidFill>
+          <a:ln>
+            <a:noFill/>
+          </a:ln>
+        </p:spPr>
+        <p:style>
+          <a:lnRef idx="1">
+            <a:schemeClr val="accent1"/>
+          </a:lnRef>
+          <a:fillRef idx="3">
+            <a:schemeClr val="accent1"/>
+          </a:fillRef>
+          <a:effectRef idx="2">
+            <a:schemeClr val="accent1"/>
+          </a:effectRef>
+          <a:fontRef idx="minor">
+            <a:schemeClr val="lt1"/>
+          </a:fontRef>
+        </p:style>
+        <p:txBody>
+          <a:bodyPr rtlCol="0" anchor="ctr"/>
+          <a:lstStyle/>
+          <a:p>
+            <a:pPr algn="ctr"/>
+          </a:p>
+        </p:txBody>
+      </p:sp>
+      <p:sp>
+        <p:nvSpPr>
+          <p:cNvPr id="9" name="Oval 8"/>
+          <p:cNvSpPr/>
+          <p:nvPr/>
+        </p:nvSpPr>
+        <p:spPr>
+          <a:xfrm>
+            <a:off x="1668994" y="2488067"/>
+            <a:ext cx="64008" cy="64008"/>
+          </a:xfrm>
+          <a:prstGeom prst="ellipse">
+            <a:avLst/>
+          </a:prstGeom>
+          <a:solidFill>
+            <a:srgbClr val="4DD9FF"/>
+          </a:solidFill>
+          <a:ln>
+            <a:noFill/>
+          </a:ln>
+        </p:spPr>
+        <p:style>
+          <a:lnRef idx="1">
+            <a:schemeClr val="accent1"/>
+          </a:lnRef>
+          <a:fillRef idx="3">
+            <a:schemeClr val="accent1"/>
+          </a:fillRef>
+          <a:effectRef idx="2">
+            <a:schemeClr val="accent1"/>
+          </a:effectRef>
+          <a:fontRef idx="minor">
+            <a:schemeClr val="lt1"/>
+          </a:fontRef>
+        </p:style>
+        <p:txBody>
+          <a:bodyPr rtlCol="0" anchor="ctr"/>
+          <a:lstStyle/>
+          <a:p>
+            <a:pPr algn="ctr"/>
+          </a:p>
+        </p:txBody>
+      </p:sp>
+      <p:sp>
+        <p:nvSpPr>
+          <p:cNvPr id="10" name="Oval 9"/>
+          <p:cNvSpPr/>
+          <p:nvPr/>
+        </p:nvSpPr>
+        <p:spPr>
+          <a:xfrm>
+            <a:off x="1057228" y="2578795"/>
+            <a:ext cx="64008" cy="64008"/>
+          </a:xfrm>
+          <a:prstGeom prst="ellipse">
+            <a:avLst/>
+          </a:prstGeom>
+          <a:solidFill>
+            <a:srgbClr val="4DD9FF"/>
+          </a:solidFill>
+          <a:ln>
+            <a:noFill/>
+          </a:ln>
+        </p:spPr>
+        <p:style>
+          <a:lnRef idx="1">
+            <a:schemeClr val="accent1"/>
+          </a:lnRef>
+          <a:fillRef idx="3">
+            <a:schemeClr val="accent1"/>
+          </a:fillRef>
+          <a:effectRef idx="2">
+            <a:schemeClr val="accent1"/>
+          </a:effectRef>
+          <a:fontRef idx="minor">
+            <a:schemeClr val="lt1"/>
+          </a:fontRef>
+        </p:style>
+        <p:txBody>
+          <a:bodyPr rtlCol="0" anchor="ctr"/>
+          <a:lstStyle/>
+          <a:p>
+            <a:pPr algn="ctr"/>
+          </a:p>
+        </p:txBody>
+      </p:sp>
+      <p:sp>
+        <p:nvSpPr>
+          <p:cNvPr id="11" name="Oval 10"/>
+          <p:cNvSpPr/>
+          <p:nvPr/>
+        </p:nvSpPr>
+        <p:spPr>
+          <a:xfrm>
+            <a:off x="1030981" y="2531564"/>
+            <a:ext cx="64008" cy="64008"/>
+          </a:xfrm>
+          <a:prstGeom prst="ellipse">
+            <a:avLst/>
+          </a:prstGeom>
+          <a:solidFill>
+            <a:srgbClr val="4DD9FF"/>
+          </a:solidFill>
+          <a:ln>
+            <a:noFill/>
+          </a:ln>
+        </p:spPr>
+        <p:style>
+          <a:lnRef idx="1">
+            <a:schemeClr val="accent1"/>
+          </a:lnRef>
+          <a:fillRef idx="3">
+            <a:schemeClr val="accent1"/>
+          </a:fillRef>
+          <a:effectRef idx="2">
+            <a:schemeClr val="accent1"/>
+          </a:effectRef>
+          <a:fontRef idx="minor">
+            <a:schemeClr val="lt1"/>
+          </a:fontRef>
+        </p:style>
+        <p:txBody>
+          <a:bodyPr rtlCol="0" anchor="ctr"/>
+          <a:lstStyle/>
+          <a:p>
+            <a:pPr algn="ctr"/>
+          </a:p>
+        </p:txBody>
+      </p:sp>
+      <p:sp>
+        <p:nvSpPr>
+          <p:cNvPr id="12" name="Oval 11"/>
+          <p:cNvSpPr/>
+          <p:nvPr/>
+        </p:nvSpPr>
+        <p:spPr>
+          <a:xfrm>
+            <a:off x="3271539" y="2298344"/>
+            <a:ext cx="91440" cy="91440"/>
+          </a:xfrm>
+          <a:prstGeom prst="ellipse">
             <a:avLst/>
           </a:prstGeom>
           <a:solidFill>
@@ -9052,92 +9243,830 @@
       </p:sp>
       <p:sp>
         <p:nvSpPr>
-          <p:cNvPr id="9" name="TextBox 8"/>
-          <p:cNvSpPr txBox="1"/>
-          <p:nvPr/>
-        </p:nvSpPr>
-        <p:spPr>
-          <a:xfrm>
-            <a:off x="548640" y="3383280"/>
-            <a:ext cx="2121408" cy="292608"/>
-          </a:xfrm>
-          <a:prstGeom prst="rect">
-            <a:avLst/>
-          </a:prstGeom>
-          <a:noFill/>
-        </p:spPr>
-        <p:txBody>
-          <a:bodyPr wrap="square" lIns="0" rIns="0" tIns="0" bIns="0" anchor="t">
-            <a:spAutoFit/>
-          </a:bodyPr>
-          <a:lstStyle/>
-          <a:p>
-            <a:pPr algn="l"/>
-            <a:r>
-              <a:rPr sz="1200" b="1" i="0">
-                <a:solidFill>
-                  <a:srgbClr val="5CF2A8"/>
-                </a:solidFill>
-                <a:latin typeface="JetBrains Mono"/>
-              </a:rPr>
-              <a:t>01 / </a:t>
-            </a:r>
-            <a:r>
-              <a:rPr sz="1200" b="1" i="0" spc="150">
-                <a:solidFill>
-                  <a:srgbClr val="5CF2A8"/>
-                </a:solidFill>
-                <a:latin typeface="JetBrains Mono"/>
-              </a:rPr>
-              <a:t>REASONING</a:t>
-            </a:r>
-          </a:p>
-        </p:txBody>
-      </p:sp>
-      <p:sp>
-        <p:nvSpPr>
-          <p:cNvPr id="10" name="TextBox 9"/>
-          <p:cNvSpPr txBox="1"/>
-          <p:nvPr/>
-        </p:nvSpPr>
-        <p:spPr>
-          <a:xfrm>
-            <a:off x="548640" y="3749040"/>
-            <a:ext cx="2121408" cy="1828800"/>
-          </a:xfrm>
-          <a:prstGeom prst="rect">
-            <a:avLst/>
-          </a:prstGeom>
-          <a:noFill/>
-        </p:spPr>
-        <p:txBody>
-          <a:bodyPr wrap="square" lIns="0" rIns="0" tIns="0" bIns="0" anchor="t">
-            <a:spAutoFit/>
-          </a:bodyPr>
-          <a:lstStyle/>
-          <a:p>
-            <a:pPr algn="l"/>
-            <a:r>
-              <a:rPr sz="1150" b="0" i="0">
-                <a:solidFill>
-                  <a:srgbClr val="8A96AA"/>
-                </a:solidFill>
-                <a:latin typeface="Space Grotesk"/>
-              </a:rPr>
-              <a:t>High dimensional spread. Structured velocity. Consistent attention.</a:t>
-            </a:r>
-          </a:p>
-        </p:txBody>
-      </p:sp>
-      <p:sp>
-        <p:nvSpPr>
-          <p:cNvPr id="11" name="Rectangle 10"/>
+          <p:cNvPr id="13" name="Oval 12"/>
           <p:cNvSpPr/>
           <p:nvPr/>
         </p:nvSpPr>
         <p:spPr>
           <a:xfrm>
-            <a:off x="2761488" y="3291840"/>
+            <a:off x="3739281" y="2783247"/>
+            <a:ext cx="64008" cy="64008"/>
+          </a:xfrm>
+          <a:prstGeom prst="ellipse">
+            <a:avLst/>
+          </a:prstGeom>
+          <a:solidFill>
+            <a:srgbClr val="5CF2A8"/>
+          </a:solidFill>
+          <a:ln>
+            <a:noFill/>
+          </a:ln>
+        </p:spPr>
+        <p:style>
+          <a:lnRef idx="1">
+            <a:schemeClr val="accent1"/>
+          </a:lnRef>
+          <a:fillRef idx="3">
+            <a:schemeClr val="accent1"/>
+          </a:fillRef>
+          <a:effectRef idx="2">
+            <a:schemeClr val="accent1"/>
+          </a:effectRef>
+          <a:fontRef idx="minor">
+            <a:schemeClr val="lt1"/>
+          </a:fontRef>
+        </p:style>
+        <p:txBody>
+          <a:bodyPr rtlCol="0" anchor="ctr"/>
+          <a:lstStyle/>
+          <a:p>
+            <a:pPr algn="ctr"/>
+          </a:p>
+        </p:txBody>
+      </p:sp>
+      <p:sp>
+        <p:nvSpPr>
+          <p:cNvPr id="14" name="Oval 13"/>
+          <p:cNvSpPr/>
+          <p:nvPr/>
+        </p:nvSpPr>
+        <p:spPr>
+          <a:xfrm>
+            <a:off x="3354315" y="2396887"/>
+            <a:ext cx="64008" cy="64008"/>
+          </a:xfrm>
+          <a:prstGeom prst="ellipse">
+            <a:avLst/>
+          </a:prstGeom>
+          <a:solidFill>
+            <a:srgbClr val="5CF2A8"/>
+          </a:solidFill>
+          <a:ln>
+            <a:noFill/>
+          </a:ln>
+        </p:spPr>
+        <p:style>
+          <a:lnRef idx="1">
+            <a:schemeClr val="accent1"/>
+          </a:lnRef>
+          <a:fillRef idx="3">
+            <a:schemeClr val="accent1"/>
+          </a:fillRef>
+          <a:effectRef idx="2">
+            <a:schemeClr val="accent1"/>
+          </a:effectRef>
+          <a:fontRef idx="minor">
+            <a:schemeClr val="lt1"/>
+          </a:fontRef>
+        </p:style>
+        <p:txBody>
+          <a:bodyPr rtlCol="0" anchor="ctr"/>
+          <a:lstStyle/>
+          <a:p>
+            <a:pPr algn="ctr"/>
+          </a:p>
+        </p:txBody>
+      </p:sp>
+      <p:sp>
+        <p:nvSpPr>
+          <p:cNvPr id="15" name="Oval 14"/>
+          <p:cNvSpPr/>
+          <p:nvPr/>
+        </p:nvSpPr>
+        <p:spPr>
+          <a:xfrm>
+            <a:off x="3999042" y="2860605"/>
+            <a:ext cx="64008" cy="64008"/>
+          </a:xfrm>
+          <a:prstGeom prst="ellipse">
+            <a:avLst/>
+          </a:prstGeom>
+          <a:solidFill>
+            <a:srgbClr val="5CF2A8"/>
+          </a:solidFill>
+          <a:ln>
+            <a:noFill/>
+          </a:ln>
+        </p:spPr>
+        <p:style>
+          <a:lnRef idx="1">
+            <a:schemeClr val="accent1"/>
+          </a:lnRef>
+          <a:fillRef idx="3">
+            <a:schemeClr val="accent1"/>
+          </a:fillRef>
+          <a:effectRef idx="2">
+            <a:schemeClr val="accent1"/>
+          </a:effectRef>
+          <a:fontRef idx="minor">
+            <a:schemeClr val="lt1"/>
+          </a:fontRef>
+        </p:style>
+        <p:txBody>
+          <a:bodyPr rtlCol="0" anchor="ctr"/>
+          <a:lstStyle/>
+          <a:p>
+            <a:pPr algn="ctr"/>
+          </a:p>
+        </p:txBody>
+      </p:sp>
+      <p:sp>
+        <p:nvSpPr>
+          <p:cNvPr id="16" name="Oval 15"/>
+          <p:cNvSpPr/>
+          <p:nvPr/>
+        </p:nvSpPr>
+        <p:spPr>
+          <a:xfrm>
+            <a:off x="3934612" y="2507904"/>
+            <a:ext cx="64008" cy="64008"/>
+          </a:xfrm>
+          <a:prstGeom prst="ellipse">
+            <a:avLst/>
+          </a:prstGeom>
+          <a:solidFill>
+            <a:srgbClr val="5CF2A8"/>
+          </a:solidFill>
+          <a:ln>
+            <a:noFill/>
+          </a:ln>
+        </p:spPr>
+        <p:style>
+          <a:lnRef idx="1">
+            <a:schemeClr val="accent1"/>
+          </a:lnRef>
+          <a:fillRef idx="3">
+            <a:schemeClr val="accent1"/>
+          </a:fillRef>
+          <a:effectRef idx="2">
+            <a:schemeClr val="accent1"/>
+          </a:effectRef>
+          <a:fontRef idx="minor">
+            <a:schemeClr val="lt1"/>
+          </a:fontRef>
+        </p:style>
+        <p:txBody>
+          <a:bodyPr rtlCol="0" anchor="ctr"/>
+          <a:lstStyle/>
+          <a:p>
+            <a:pPr algn="ctr"/>
+          </a:p>
+        </p:txBody>
+      </p:sp>
+      <p:sp>
+        <p:nvSpPr>
+          <p:cNvPr id="17" name="Oval 16"/>
+          <p:cNvSpPr/>
+          <p:nvPr/>
+        </p:nvSpPr>
+        <p:spPr>
+          <a:xfrm>
+            <a:off x="6644722" y="2270097"/>
+            <a:ext cx="91440" cy="91440"/>
+          </a:xfrm>
+          <a:prstGeom prst="ellipse">
+            <a:avLst/>
+          </a:prstGeom>
+          <a:solidFill>
+            <a:srgbClr val="B466FF"/>
+          </a:solidFill>
+          <a:ln>
+            <a:noFill/>
+          </a:ln>
+        </p:spPr>
+        <p:style>
+          <a:lnRef idx="1">
+            <a:schemeClr val="accent1"/>
+          </a:lnRef>
+          <a:fillRef idx="3">
+            <a:schemeClr val="accent1"/>
+          </a:fillRef>
+          <a:effectRef idx="2">
+            <a:schemeClr val="accent1"/>
+          </a:effectRef>
+          <a:fontRef idx="minor">
+            <a:schemeClr val="lt1"/>
+          </a:fontRef>
+        </p:style>
+        <p:txBody>
+          <a:bodyPr rtlCol="0" anchor="ctr"/>
+          <a:lstStyle/>
+          <a:p>
+            <a:pPr algn="ctr"/>
+          </a:p>
+        </p:txBody>
+      </p:sp>
+      <p:sp>
+        <p:nvSpPr>
+          <p:cNvPr id="18" name="Oval 17"/>
+          <p:cNvSpPr/>
+          <p:nvPr/>
+        </p:nvSpPr>
+        <p:spPr>
+          <a:xfrm>
+            <a:off x="6507652" y="2439370"/>
+            <a:ext cx="64008" cy="64008"/>
+          </a:xfrm>
+          <a:prstGeom prst="ellipse">
+            <a:avLst/>
+          </a:prstGeom>
+          <a:solidFill>
+            <a:srgbClr val="B466FF"/>
+          </a:solidFill>
+          <a:ln>
+            <a:noFill/>
+          </a:ln>
+        </p:spPr>
+        <p:style>
+          <a:lnRef idx="1">
+            <a:schemeClr val="accent1"/>
+          </a:lnRef>
+          <a:fillRef idx="3">
+            <a:schemeClr val="accent1"/>
+          </a:fillRef>
+          <a:effectRef idx="2">
+            <a:schemeClr val="accent1"/>
+          </a:effectRef>
+          <a:fontRef idx="minor">
+            <a:schemeClr val="lt1"/>
+          </a:fontRef>
+        </p:style>
+        <p:txBody>
+          <a:bodyPr rtlCol="0" anchor="ctr"/>
+          <a:lstStyle/>
+          <a:p>
+            <a:pPr algn="ctr"/>
+          </a:p>
+        </p:txBody>
+      </p:sp>
+      <p:sp>
+        <p:nvSpPr>
+          <p:cNvPr id="19" name="Oval 18"/>
+          <p:cNvSpPr/>
+          <p:nvPr/>
+        </p:nvSpPr>
+        <p:spPr>
+          <a:xfrm>
+            <a:off x="5593346" y="2329393"/>
+            <a:ext cx="64008" cy="64008"/>
+          </a:xfrm>
+          <a:prstGeom prst="ellipse">
+            <a:avLst/>
+          </a:prstGeom>
+          <a:solidFill>
+            <a:srgbClr val="B466FF"/>
+          </a:solidFill>
+          <a:ln>
+            <a:noFill/>
+          </a:ln>
+        </p:spPr>
+        <p:style>
+          <a:lnRef idx="1">
+            <a:schemeClr val="accent1"/>
+          </a:lnRef>
+          <a:fillRef idx="3">
+            <a:schemeClr val="accent1"/>
+          </a:fillRef>
+          <a:effectRef idx="2">
+            <a:schemeClr val="accent1"/>
+          </a:effectRef>
+          <a:fontRef idx="minor">
+            <a:schemeClr val="lt1"/>
+          </a:fontRef>
+        </p:style>
+        <p:txBody>
+          <a:bodyPr rtlCol="0" anchor="ctr"/>
+          <a:lstStyle/>
+          <a:p>
+            <a:pPr algn="ctr"/>
+          </a:p>
+        </p:txBody>
+      </p:sp>
+      <p:sp>
+        <p:nvSpPr>
+          <p:cNvPr id="20" name="Oval 19"/>
+          <p:cNvSpPr/>
+          <p:nvPr/>
+        </p:nvSpPr>
+        <p:spPr>
+          <a:xfrm>
+            <a:off x="5803583" y="2776382"/>
+            <a:ext cx="64008" cy="64008"/>
+          </a:xfrm>
+          <a:prstGeom prst="ellipse">
+            <a:avLst/>
+          </a:prstGeom>
+          <a:solidFill>
+            <a:srgbClr val="B466FF"/>
+          </a:solidFill>
+          <a:ln>
+            <a:noFill/>
+          </a:ln>
+        </p:spPr>
+        <p:style>
+          <a:lnRef idx="1">
+            <a:schemeClr val="accent1"/>
+          </a:lnRef>
+          <a:fillRef idx="3">
+            <a:schemeClr val="accent1"/>
+          </a:fillRef>
+          <a:effectRef idx="2">
+            <a:schemeClr val="accent1"/>
+          </a:effectRef>
+          <a:fontRef idx="minor">
+            <a:schemeClr val="lt1"/>
+          </a:fontRef>
+        </p:style>
+        <p:txBody>
+          <a:bodyPr rtlCol="0" anchor="ctr"/>
+          <a:lstStyle/>
+          <a:p>
+            <a:pPr algn="ctr"/>
+          </a:p>
+        </p:txBody>
+      </p:sp>
+      <p:sp>
+        <p:nvSpPr>
+          <p:cNvPr id="21" name="Oval 20"/>
+          <p:cNvSpPr/>
+          <p:nvPr/>
+        </p:nvSpPr>
+        <p:spPr>
+          <a:xfrm>
+            <a:off x="5640035" y="2626266"/>
+            <a:ext cx="64008" cy="64008"/>
+          </a:xfrm>
+          <a:prstGeom prst="ellipse">
+            <a:avLst/>
+          </a:prstGeom>
+          <a:solidFill>
+            <a:srgbClr val="B466FF"/>
+          </a:solidFill>
+          <a:ln>
+            <a:noFill/>
+          </a:ln>
+        </p:spPr>
+        <p:style>
+          <a:lnRef idx="1">
+            <a:schemeClr val="accent1"/>
+          </a:lnRef>
+          <a:fillRef idx="3">
+            <a:schemeClr val="accent1"/>
+          </a:fillRef>
+          <a:effectRef idx="2">
+            <a:schemeClr val="accent1"/>
+          </a:effectRef>
+          <a:fontRef idx="minor">
+            <a:schemeClr val="lt1"/>
+          </a:fontRef>
+        </p:style>
+        <p:txBody>
+          <a:bodyPr rtlCol="0" anchor="ctr"/>
+          <a:lstStyle/>
+          <a:p>
+            <a:pPr algn="ctr"/>
+          </a:p>
+        </p:txBody>
+      </p:sp>
+      <p:sp>
+        <p:nvSpPr>
+          <p:cNvPr id="22" name="Oval 21"/>
+          <p:cNvSpPr/>
+          <p:nvPr/>
+        </p:nvSpPr>
+        <p:spPr>
+          <a:xfrm>
+            <a:off x="8425719" y="2478645"/>
+            <a:ext cx="91440" cy="91440"/>
+          </a:xfrm>
+          <a:prstGeom prst="ellipse">
+            <a:avLst/>
+          </a:prstGeom>
+          <a:solidFill>
+            <a:srgbClr val="FFD24D"/>
+          </a:solidFill>
+          <a:ln>
+            <a:noFill/>
+          </a:ln>
+        </p:spPr>
+        <p:style>
+          <a:lnRef idx="1">
+            <a:schemeClr val="accent1"/>
+          </a:lnRef>
+          <a:fillRef idx="3">
+            <a:schemeClr val="accent1"/>
+          </a:fillRef>
+          <a:effectRef idx="2">
+            <a:schemeClr val="accent1"/>
+          </a:effectRef>
+          <a:fontRef idx="minor">
+            <a:schemeClr val="lt1"/>
+          </a:fontRef>
+        </p:style>
+        <p:txBody>
+          <a:bodyPr rtlCol="0" anchor="ctr"/>
+          <a:lstStyle/>
+          <a:p>
+            <a:pPr algn="ctr"/>
+          </a:p>
+        </p:txBody>
+      </p:sp>
+      <p:sp>
+        <p:nvSpPr>
+          <p:cNvPr id="23" name="Oval 22"/>
+          <p:cNvSpPr/>
+          <p:nvPr/>
+        </p:nvSpPr>
+        <p:spPr>
+          <a:xfrm>
+            <a:off x="8322724" y="2294186"/>
+            <a:ext cx="64008" cy="64008"/>
+          </a:xfrm>
+          <a:prstGeom prst="ellipse">
+            <a:avLst/>
+          </a:prstGeom>
+          <a:solidFill>
+            <a:srgbClr val="FFD24D"/>
+          </a:solidFill>
+          <a:ln>
+            <a:noFill/>
+          </a:ln>
+        </p:spPr>
+        <p:style>
+          <a:lnRef idx="1">
+            <a:schemeClr val="accent1"/>
+          </a:lnRef>
+          <a:fillRef idx="3">
+            <a:schemeClr val="accent1"/>
+          </a:fillRef>
+          <a:effectRef idx="2">
+            <a:schemeClr val="accent1"/>
+          </a:effectRef>
+          <a:fontRef idx="minor">
+            <a:schemeClr val="lt1"/>
+          </a:fontRef>
+        </p:style>
+        <p:txBody>
+          <a:bodyPr rtlCol="0" anchor="ctr"/>
+          <a:lstStyle/>
+          <a:p>
+            <a:pPr algn="ctr"/>
+          </a:p>
+        </p:txBody>
+      </p:sp>
+      <p:sp>
+        <p:nvSpPr>
+          <p:cNvPr id="24" name="Oval 23"/>
+          <p:cNvSpPr/>
+          <p:nvPr/>
+        </p:nvSpPr>
+        <p:spPr>
+          <a:xfrm>
+            <a:off x="7697824" y="2385827"/>
+            <a:ext cx="64008" cy="64008"/>
+          </a:xfrm>
+          <a:prstGeom prst="ellipse">
+            <a:avLst/>
+          </a:prstGeom>
+          <a:solidFill>
+            <a:srgbClr val="FFD24D"/>
+          </a:solidFill>
+          <a:ln>
+            <a:noFill/>
+          </a:ln>
+        </p:spPr>
+        <p:style>
+          <a:lnRef idx="1">
+            <a:schemeClr val="accent1"/>
+          </a:lnRef>
+          <a:fillRef idx="3">
+            <a:schemeClr val="accent1"/>
+          </a:fillRef>
+          <a:effectRef idx="2">
+            <a:schemeClr val="accent1"/>
+          </a:effectRef>
+          <a:fontRef idx="minor">
+            <a:schemeClr val="lt1"/>
+          </a:fontRef>
+        </p:style>
+        <p:txBody>
+          <a:bodyPr rtlCol="0" anchor="ctr"/>
+          <a:lstStyle/>
+          <a:p>
+            <a:pPr algn="ctr"/>
+          </a:p>
+        </p:txBody>
+      </p:sp>
+      <p:sp>
+        <p:nvSpPr>
+          <p:cNvPr id="25" name="Oval 24"/>
+          <p:cNvSpPr/>
+          <p:nvPr/>
+        </p:nvSpPr>
+        <p:spPr>
+          <a:xfrm>
+            <a:off x="8492544" y="2527690"/>
+            <a:ext cx="64008" cy="64008"/>
+          </a:xfrm>
+          <a:prstGeom prst="ellipse">
+            <a:avLst/>
+          </a:prstGeom>
+          <a:solidFill>
+            <a:srgbClr val="FFD24D"/>
+          </a:solidFill>
+          <a:ln>
+            <a:noFill/>
+          </a:ln>
+        </p:spPr>
+        <p:style>
+          <a:lnRef idx="1">
+            <a:schemeClr val="accent1"/>
+          </a:lnRef>
+          <a:fillRef idx="3">
+            <a:schemeClr val="accent1"/>
+          </a:fillRef>
+          <a:effectRef idx="2">
+            <a:schemeClr val="accent1"/>
+          </a:effectRef>
+          <a:fontRef idx="minor">
+            <a:schemeClr val="lt1"/>
+          </a:fontRef>
+        </p:style>
+        <p:txBody>
+          <a:bodyPr rtlCol="0" anchor="ctr"/>
+          <a:lstStyle/>
+          <a:p>
+            <a:pPr algn="ctr"/>
+          </a:p>
+        </p:txBody>
+      </p:sp>
+      <p:sp>
+        <p:nvSpPr>
+          <p:cNvPr id="26" name="Oval 25"/>
+          <p:cNvSpPr/>
+          <p:nvPr/>
+        </p:nvSpPr>
+        <p:spPr>
+          <a:xfrm>
+            <a:off x="8023683" y="2628802"/>
+            <a:ext cx="64008" cy="64008"/>
+          </a:xfrm>
+          <a:prstGeom prst="ellipse">
+            <a:avLst/>
+          </a:prstGeom>
+          <a:solidFill>
+            <a:srgbClr val="FFD24D"/>
+          </a:solidFill>
+          <a:ln>
+            <a:noFill/>
+          </a:ln>
+        </p:spPr>
+        <p:style>
+          <a:lnRef idx="1">
+            <a:schemeClr val="accent1"/>
+          </a:lnRef>
+          <a:fillRef idx="3">
+            <a:schemeClr val="accent1"/>
+          </a:fillRef>
+          <a:effectRef idx="2">
+            <a:schemeClr val="accent1"/>
+          </a:effectRef>
+          <a:fontRef idx="minor">
+            <a:schemeClr val="lt1"/>
+          </a:fontRef>
+        </p:style>
+        <p:txBody>
+          <a:bodyPr rtlCol="0" anchor="ctr"/>
+          <a:lstStyle/>
+          <a:p>
+            <a:pPr algn="ctr"/>
+          </a:p>
+        </p:txBody>
+      </p:sp>
+      <p:sp>
+        <p:nvSpPr>
+          <p:cNvPr id="27" name="Oval 26"/>
+          <p:cNvSpPr/>
+          <p:nvPr/>
+        </p:nvSpPr>
+        <p:spPr>
+          <a:xfrm>
+            <a:off x="10400805" y="2432155"/>
+            <a:ext cx="91440" cy="91440"/>
+          </a:xfrm>
+          <a:prstGeom prst="ellipse">
+            <a:avLst/>
+          </a:prstGeom>
+          <a:solidFill>
+            <a:srgbClr val="FF9C52"/>
+          </a:solidFill>
+          <a:ln>
+            <a:noFill/>
+          </a:ln>
+        </p:spPr>
+        <p:style>
+          <a:lnRef idx="1">
+            <a:schemeClr val="accent1"/>
+          </a:lnRef>
+          <a:fillRef idx="3">
+            <a:schemeClr val="accent1"/>
+          </a:fillRef>
+          <a:effectRef idx="2">
+            <a:schemeClr val="accent1"/>
+          </a:effectRef>
+          <a:fontRef idx="minor">
+            <a:schemeClr val="lt1"/>
+          </a:fontRef>
+        </p:style>
+        <p:txBody>
+          <a:bodyPr rtlCol="0" anchor="ctr"/>
+          <a:lstStyle/>
+          <a:p>
+            <a:pPr algn="ctr"/>
+          </a:p>
+        </p:txBody>
+      </p:sp>
+      <p:sp>
+        <p:nvSpPr>
+          <p:cNvPr id="28" name="Oval 27"/>
+          <p:cNvSpPr/>
+          <p:nvPr/>
+        </p:nvSpPr>
+        <p:spPr>
+          <a:xfrm>
+            <a:off x="10851304" y="2701408"/>
+            <a:ext cx="64008" cy="64008"/>
+          </a:xfrm>
+          <a:prstGeom prst="ellipse">
+            <a:avLst/>
+          </a:prstGeom>
+          <a:solidFill>
+            <a:srgbClr val="FF9C52"/>
+          </a:solidFill>
+          <a:ln>
+            <a:noFill/>
+          </a:ln>
+        </p:spPr>
+        <p:style>
+          <a:lnRef idx="1">
+            <a:schemeClr val="accent1"/>
+          </a:lnRef>
+          <a:fillRef idx="3">
+            <a:schemeClr val="accent1"/>
+          </a:fillRef>
+          <a:effectRef idx="2">
+            <a:schemeClr val="accent1"/>
+          </a:effectRef>
+          <a:fontRef idx="minor">
+            <a:schemeClr val="lt1"/>
+          </a:fontRef>
+        </p:style>
+        <p:txBody>
+          <a:bodyPr rtlCol="0" anchor="ctr"/>
+          <a:lstStyle/>
+          <a:p>
+            <a:pPr algn="ctr"/>
+          </a:p>
+        </p:txBody>
+      </p:sp>
+      <p:sp>
+        <p:nvSpPr>
+          <p:cNvPr id="29" name="Oval 28"/>
+          <p:cNvSpPr/>
+          <p:nvPr/>
+        </p:nvSpPr>
+        <p:spPr>
+          <a:xfrm>
+            <a:off x="10146855" y="2621673"/>
+            <a:ext cx="64008" cy="64008"/>
+          </a:xfrm>
+          <a:prstGeom prst="ellipse">
+            <a:avLst/>
+          </a:prstGeom>
+          <a:solidFill>
+            <a:srgbClr val="FF9C52"/>
+          </a:solidFill>
+          <a:ln>
+            <a:noFill/>
+          </a:ln>
+        </p:spPr>
+        <p:style>
+          <a:lnRef idx="1">
+            <a:schemeClr val="accent1"/>
+          </a:lnRef>
+          <a:fillRef idx="3">
+            <a:schemeClr val="accent1"/>
+          </a:fillRef>
+          <a:effectRef idx="2">
+            <a:schemeClr val="accent1"/>
+          </a:effectRef>
+          <a:fontRef idx="minor">
+            <a:schemeClr val="lt1"/>
+          </a:fontRef>
+        </p:style>
+        <p:txBody>
+          <a:bodyPr rtlCol="0" anchor="ctr"/>
+          <a:lstStyle/>
+          <a:p>
+            <a:pPr algn="ctr"/>
+          </a:p>
+        </p:txBody>
+      </p:sp>
+      <p:sp>
+        <p:nvSpPr>
+          <p:cNvPr id="30" name="Oval 29"/>
+          <p:cNvSpPr/>
+          <p:nvPr/>
+        </p:nvSpPr>
+        <p:spPr>
+          <a:xfrm>
+            <a:off x="10506707" y="2814154"/>
+            <a:ext cx="64008" cy="64008"/>
+          </a:xfrm>
+          <a:prstGeom prst="ellipse">
+            <a:avLst/>
+          </a:prstGeom>
+          <a:solidFill>
+            <a:srgbClr val="FF9C52"/>
+          </a:solidFill>
+          <a:ln>
+            <a:noFill/>
+          </a:ln>
+        </p:spPr>
+        <p:style>
+          <a:lnRef idx="1">
+            <a:schemeClr val="accent1"/>
+          </a:lnRef>
+          <a:fillRef idx="3">
+            <a:schemeClr val="accent1"/>
+          </a:fillRef>
+          <a:effectRef idx="2">
+            <a:schemeClr val="accent1"/>
+          </a:effectRef>
+          <a:fontRef idx="minor">
+            <a:schemeClr val="lt1"/>
+          </a:fontRef>
+        </p:style>
+        <p:txBody>
+          <a:bodyPr rtlCol="0" anchor="ctr"/>
+          <a:lstStyle/>
+          <a:p>
+            <a:pPr algn="ctr"/>
+          </a:p>
+        </p:txBody>
+      </p:sp>
+      <p:sp>
+        <p:nvSpPr>
+          <p:cNvPr id="31" name="Oval 30"/>
+          <p:cNvSpPr/>
+          <p:nvPr/>
+        </p:nvSpPr>
+        <p:spPr>
+          <a:xfrm>
+            <a:off x="10768178" y="2438300"/>
+            <a:ext cx="64008" cy="64008"/>
+          </a:xfrm>
+          <a:prstGeom prst="ellipse">
+            <a:avLst/>
+          </a:prstGeom>
+          <a:solidFill>
+            <a:srgbClr val="FF9C52"/>
+          </a:solidFill>
+          <a:ln>
+            <a:noFill/>
+          </a:ln>
+        </p:spPr>
+        <p:style>
+          <a:lnRef idx="1">
+            <a:schemeClr val="accent1"/>
+          </a:lnRef>
+          <a:fillRef idx="3">
+            <a:schemeClr val="accent1"/>
+          </a:fillRef>
+          <a:effectRef idx="2">
+            <a:schemeClr val="accent1"/>
+          </a:effectRef>
+          <a:fontRef idx="minor">
+            <a:schemeClr val="lt1"/>
+          </a:fontRef>
+        </p:style>
+        <p:txBody>
+          <a:bodyPr rtlCol="0" anchor="ctr"/>
+          <a:lstStyle/>
+          <a:p>
+            <a:pPr algn="ctr"/>
+          </a:p>
+        </p:txBody>
+      </p:sp>
+      <p:sp>
+        <p:nvSpPr>
+          <p:cNvPr id="32" name="Rectangle 31"/>
+          <p:cNvSpPr/>
+          <p:nvPr/>
+        </p:nvSpPr>
+        <p:spPr>
+          <a:xfrm>
+            <a:off x="548640" y="3291840"/>
             <a:ext cx="2121408" cy="27432"/>
           </a:xfrm>
           <a:prstGeom prst="rect">
@@ -9174,7 +10103,129 @@
       </p:sp>
       <p:sp>
         <p:nvSpPr>
-          <p:cNvPr id="12" name="TextBox 11"/>
+          <p:cNvPr id="33" name="TextBox 32"/>
+          <p:cNvSpPr txBox="1"/>
+          <p:nvPr/>
+        </p:nvSpPr>
+        <p:spPr>
+          <a:xfrm>
+            <a:off x="548640" y="3383280"/>
+            <a:ext cx="2121408" cy="292608"/>
+          </a:xfrm>
+          <a:prstGeom prst="rect">
+            <a:avLst/>
+          </a:prstGeom>
+          <a:noFill/>
+        </p:spPr>
+        <p:txBody>
+          <a:bodyPr wrap="square" lIns="0" rIns="0" tIns="0" bIns="0" anchor="t">
+            <a:spAutoFit/>
+          </a:bodyPr>
+          <a:lstStyle/>
+          <a:p>
+            <a:pPr algn="l"/>
+            <a:r>
+              <a:rPr sz="1200" b="1" i="0">
+                <a:solidFill>
+                  <a:srgbClr val="4DD9FF"/>
+                </a:solidFill>
+                <a:latin typeface="JetBrains Mono"/>
+              </a:rPr>
+              <a:t>01 / </a:t>
+            </a:r>
+            <a:r>
+              <a:rPr sz="1200" b="1" i="0" spc="150">
+                <a:solidFill>
+                  <a:srgbClr val="4DD9FF"/>
+                </a:solidFill>
+                <a:latin typeface="JetBrains Mono"/>
+              </a:rPr>
+              <a:t>REASONING</a:t>
+            </a:r>
+          </a:p>
+        </p:txBody>
+      </p:sp>
+      <p:sp>
+        <p:nvSpPr>
+          <p:cNvPr id="34" name="TextBox 33"/>
+          <p:cNvSpPr txBox="1"/>
+          <p:nvPr/>
+        </p:nvSpPr>
+        <p:spPr>
+          <a:xfrm>
+            <a:off x="548640" y="3749040"/>
+            <a:ext cx="2121408" cy="1828800"/>
+          </a:xfrm>
+          <a:prstGeom prst="rect">
+            <a:avLst/>
+          </a:prstGeom>
+          <a:noFill/>
+        </p:spPr>
+        <p:txBody>
+          <a:bodyPr wrap="square" lIns="0" rIns="0" tIns="0" bIns="0" anchor="t">
+            <a:spAutoFit/>
+          </a:bodyPr>
+          <a:lstStyle/>
+          <a:p>
+            <a:pPr algn="l"/>
+            <a:r>
+              <a:rPr sz="1150" b="0" i="0">
+                <a:solidFill>
+                  <a:srgbClr val="8A96AA"/>
+                </a:solidFill>
+                <a:latin typeface="Space Grotesk"/>
+              </a:rPr>
+              <a:t>High dimensional spread. Structured velocity. Consistent attention.</a:t>
+            </a:r>
+          </a:p>
+        </p:txBody>
+      </p:sp>
+      <p:sp>
+        <p:nvSpPr>
+          <p:cNvPr id="35" name="Rectangle 34"/>
+          <p:cNvSpPr/>
+          <p:nvPr/>
+        </p:nvSpPr>
+        <p:spPr>
+          <a:xfrm>
+            <a:off x="2761488" y="3291840"/>
+            <a:ext cx="2121408" cy="27432"/>
+          </a:xfrm>
+          <a:prstGeom prst="rect">
+            <a:avLst/>
+          </a:prstGeom>
+          <a:solidFill>
+            <a:srgbClr val="5CF2A8"/>
+          </a:solidFill>
+          <a:ln>
+            <a:noFill/>
+          </a:ln>
+        </p:spPr>
+        <p:style>
+          <a:lnRef idx="1">
+            <a:schemeClr val="accent1"/>
+          </a:lnRef>
+          <a:fillRef idx="3">
+            <a:schemeClr val="accent1"/>
+          </a:fillRef>
+          <a:effectRef idx="2">
+            <a:schemeClr val="accent1"/>
+          </a:effectRef>
+          <a:fontRef idx="minor">
+            <a:schemeClr val="lt1"/>
+          </a:fontRef>
+        </p:style>
+        <p:txBody>
+          <a:bodyPr rtlCol="0" anchor="ctr"/>
+          <a:lstStyle/>
+          <a:p>
+            <a:pPr algn="ctr"/>
+          </a:p>
+        </p:txBody>
+      </p:sp>
+      <p:sp>
+        <p:nvSpPr>
+          <p:cNvPr id="36" name="TextBox 35"/>
           <p:cNvSpPr txBox="1"/>
           <p:nvPr/>
         </p:nvSpPr>
@@ -9198,7 +10249,7 @@
             <a:r>
               <a:rPr sz="1200" b="1" i="0">
                 <a:solidFill>
-                  <a:srgbClr val="4DD9FF"/>
+                  <a:srgbClr val="5CF2A8"/>
                 </a:solidFill>
                 <a:latin typeface="JetBrains Mono"/>
               </a:rPr>
@@ -9207,7 +10258,7 @@
             <a:r>
               <a:rPr sz="1200" b="1" i="0" spc="150">
                 <a:solidFill>
-                  <a:srgbClr val="4DD9FF"/>
+                  <a:srgbClr val="5CF2A8"/>
                 </a:solidFill>
                 <a:latin typeface="JetBrains Mono"/>
               </a:rPr>
@@ -9218,7 +10269,7 @@
       </p:sp>
       <p:sp>
         <p:nvSpPr>
-          <p:cNvPr id="13" name="TextBox 12"/>
+          <p:cNvPr id="37" name="TextBox 36"/>
           <p:cNvSpPr txBox="1"/>
           <p:nvPr/>
         </p:nvSpPr>
@@ -9253,13 +10304,257 @@
       </p:sp>
       <p:sp>
         <p:nvSpPr>
-          <p:cNvPr id="14" name="Rectangle 13"/>
+          <p:cNvPr id="38" name="Rectangle 37"/>
           <p:cNvSpPr/>
           <p:nvPr/>
         </p:nvSpPr>
         <p:spPr>
           <a:xfrm>
             <a:off x="4974336" y="3291840"/>
+            <a:ext cx="2121408" cy="27432"/>
+          </a:xfrm>
+          <a:prstGeom prst="rect">
+            <a:avLst/>
+          </a:prstGeom>
+          <a:solidFill>
+            <a:srgbClr val="B466FF"/>
+          </a:solidFill>
+          <a:ln>
+            <a:noFill/>
+          </a:ln>
+        </p:spPr>
+        <p:style>
+          <a:lnRef idx="1">
+            <a:schemeClr val="accent1"/>
+          </a:lnRef>
+          <a:fillRef idx="3">
+            <a:schemeClr val="accent1"/>
+          </a:fillRef>
+          <a:effectRef idx="2">
+            <a:schemeClr val="accent1"/>
+          </a:effectRef>
+          <a:fontRef idx="minor">
+            <a:schemeClr val="lt1"/>
+          </a:fontRef>
+        </p:style>
+        <p:txBody>
+          <a:bodyPr rtlCol="0" anchor="ctr"/>
+          <a:lstStyle/>
+          <a:p>
+            <a:pPr algn="ctr"/>
+          </a:p>
+        </p:txBody>
+      </p:sp>
+      <p:sp>
+        <p:nvSpPr>
+          <p:cNvPr id="39" name="TextBox 38"/>
+          <p:cNvSpPr txBox="1"/>
+          <p:nvPr/>
+        </p:nvSpPr>
+        <p:spPr>
+          <a:xfrm>
+            <a:off x="4974336" y="3383280"/>
+            <a:ext cx="2121408" cy="292608"/>
+          </a:xfrm>
+          <a:prstGeom prst="rect">
+            <a:avLst/>
+          </a:prstGeom>
+          <a:noFill/>
+        </p:spPr>
+        <p:txBody>
+          <a:bodyPr wrap="square" lIns="0" rIns="0" tIns="0" bIns="0" anchor="t">
+            <a:spAutoFit/>
+          </a:bodyPr>
+          <a:lstStyle/>
+          <a:p>
+            <a:pPr algn="l"/>
+            <a:r>
+              <a:rPr sz="1200" b="1" i="0">
+                <a:solidFill>
+                  <a:srgbClr val="B466FF"/>
+                </a:solidFill>
+                <a:latin typeface="JetBrains Mono"/>
+              </a:rPr>
+              <a:t>03 / </a:t>
+            </a:r>
+            <a:r>
+              <a:rPr sz="1200" b="1" i="0" spc="150">
+                <a:solidFill>
+                  <a:srgbClr val="B466FF"/>
+                </a:solidFill>
+                <a:latin typeface="JetBrains Mono"/>
+              </a:rPr>
+              <a:t>CREATIVITY</a:t>
+            </a:r>
+          </a:p>
+        </p:txBody>
+      </p:sp>
+      <p:sp>
+        <p:nvSpPr>
+          <p:cNvPr id="40" name="TextBox 39"/>
+          <p:cNvSpPr txBox="1"/>
+          <p:nvPr/>
+        </p:nvSpPr>
+        <p:spPr>
+          <a:xfrm>
+            <a:off x="4974336" y="3749040"/>
+            <a:ext cx="2121408" cy="1828800"/>
+          </a:xfrm>
+          <a:prstGeom prst="rect">
+            <a:avLst/>
+          </a:prstGeom>
+          <a:noFill/>
+        </p:spPr>
+        <p:txBody>
+          <a:bodyPr wrap="square" lIns="0" rIns="0" tIns="0" bIns="0" anchor="t">
+            <a:spAutoFit/>
+          </a:bodyPr>
+          <a:lstStyle/>
+          <a:p>
+            <a:pPr algn="l"/>
+            <a:r>
+              <a:rPr sz="1150" b="0" i="0">
+                <a:solidFill>
+                  <a:srgbClr val="8A96AA"/>
+                </a:solidFill>
+                <a:latin typeface="Space Grotesk"/>
+              </a:rPr>
+              <a:t>Widest dimensional spread. Exploratory attention.</a:t>
+            </a:r>
+          </a:p>
+        </p:txBody>
+      </p:sp>
+      <p:sp>
+        <p:nvSpPr>
+          <p:cNvPr id="41" name="Rectangle 40"/>
+          <p:cNvSpPr/>
+          <p:nvPr/>
+        </p:nvSpPr>
+        <p:spPr>
+          <a:xfrm>
+            <a:off x="7187184" y="3291840"/>
+            <a:ext cx="2121408" cy="27432"/>
+          </a:xfrm>
+          <a:prstGeom prst="rect">
+            <a:avLst/>
+          </a:prstGeom>
+          <a:solidFill>
+            <a:srgbClr val="FFD24D"/>
+          </a:solidFill>
+          <a:ln>
+            <a:noFill/>
+          </a:ln>
+        </p:spPr>
+        <p:style>
+          <a:lnRef idx="1">
+            <a:schemeClr val="accent1"/>
+          </a:lnRef>
+          <a:fillRef idx="3">
+            <a:schemeClr val="accent1"/>
+          </a:fillRef>
+          <a:effectRef idx="2">
+            <a:schemeClr val="accent1"/>
+          </a:effectRef>
+          <a:fontRef idx="minor">
+            <a:schemeClr val="lt1"/>
+          </a:fontRef>
+        </p:style>
+        <p:txBody>
+          <a:bodyPr rtlCol="0" anchor="ctr"/>
+          <a:lstStyle/>
+          <a:p>
+            <a:pPr algn="ctr"/>
+          </a:p>
+        </p:txBody>
+      </p:sp>
+      <p:sp>
+        <p:nvSpPr>
+          <p:cNvPr id="42" name="TextBox 41"/>
+          <p:cNvSpPr txBox="1"/>
+          <p:nvPr/>
+        </p:nvSpPr>
+        <p:spPr>
+          <a:xfrm>
+            <a:off x="7187184" y="3383280"/>
+            <a:ext cx="2121408" cy="292608"/>
+          </a:xfrm>
+          <a:prstGeom prst="rect">
+            <a:avLst/>
+          </a:prstGeom>
+          <a:noFill/>
+        </p:spPr>
+        <p:txBody>
+          <a:bodyPr wrap="square" lIns="0" rIns="0" tIns="0" bIns="0" anchor="t">
+            <a:spAutoFit/>
+          </a:bodyPr>
+          <a:lstStyle/>
+          <a:p>
+            <a:pPr algn="l"/>
+            <a:r>
+              <a:rPr sz="1200" b="1" i="0">
+                <a:solidFill>
+                  <a:srgbClr val="FFD24D"/>
+                </a:solidFill>
+                <a:latin typeface="JetBrains Mono"/>
+              </a:rPr>
+              <a:t>04 / </a:t>
+            </a:r>
+            <a:r>
+              <a:rPr sz="1200" b="1" i="0" spc="150">
+                <a:solidFill>
+                  <a:srgbClr val="FFD24D"/>
+                </a:solidFill>
+                <a:latin typeface="JetBrains Mono"/>
+              </a:rPr>
+              <a:t>PRECISION</a:t>
+            </a:r>
+          </a:p>
+        </p:txBody>
+      </p:sp>
+      <p:sp>
+        <p:nvSpPr>
+          <p:cNvPr id="43" name="TextBox 42"/>
+          <p:cNvSpPr txBox="1"/>
+          <p:nvPr/>
+        </p:nvSpPr>
+        <p:spPr>
+          <a:xfrm>
+            <a:off x="7187184" y="3749040"/>
+            <a:ext cx="2121408" cy="1828800"/>
+          </a:xfrm>
+          <a:prstGeom prst="rect">
+            <a:avLst/>
+          </a:prstGeom>
+          <a:noFill/>
+        </p:spPr>
+        <p:txBody>
+          <a:bodyPr wrap="square" lIns="0" rIns="0" tIns="0" bIns="0" anchor="t">
+            <a:spAutoFit/>
+          </a:bodyPr>
+          <a:lstStyle/>
+          <a:p>
+            <a:pPr algn="l"/>
+            <a:r>
+              <a:rPr sz="1150" b="0" i="0">
+                <a:solidFill>
+                  <a:srgbClr val="8A96AA"/>
+                </a:solidFill>
+                <a:latin typeface="Space Grotesk"/>
+              </a:rPr>
+              <a:t>Highest per-token focus. Moderate trajectory spread.</a:t>
+            </a:r>
+          </a:p>
+        </p:txBody>
+      </p:sp>
+      <p:sp>
+        <p:nvSpPr>
+          <p:cNvPr id="44" name="Rectangle 43"/>
+          <p:cNvSpPr/>
+          <p:nvPr/>
+        </p:nvSpPr>
+        <p:spPr>
+          <a:xfrm>
+            <a:off x="9400032" y="3291840"/>
             <a:ext cx="2121408" cy="27432"/>
           </a:xfrm>
           <a:prstGeom prst="rect">
@@ -9296,251 +10591,7 @@
       </p:sp>
       <p:sp>
         <p:nvSpPr>
-          <p:cNvPr id="15" name="TextBox 14"/>
-          <p:cNvSpPr txBox="1"/>
-          <p:nvPr/>
-        </p:nvSpPr>
-        <p:spPr>
-          <a:xfrm>
-            <a:off x="4974336" y="3383280"/>
-            <a:ext cx="2121408" cy="292608"/>
-          </a:xfrm>
-          <a:prstGeom prst="rect">
-            <a:avLst/>
-          </a:prstGeom>
-          <a:noFill/>
-        </p:spPr>
-        <p:txBody>
-          <a:bodyPr wrap="square" lIns="0" rIns="0" tIns="0" bIns="0" anchor="t">
-            <a:spAutoFit/>
-          </a:bodyPr>
-          <a:lstStyle/>
-          <a:p>
-            <a:pPr algn="l"/>
-            <a:r>
-              <a:rPr sz="1200" b="1" i="0">
-                <a:solidFill>
-                  <a:srgbClr val="FF9C52"/>
-                </a:solidFill>
-                <a:latin typeface="JetBrains Mono"/>
-              </a:rPr>
-              <a:t>03 / </a:t>
-            </a:r>
-            <a:r>
-              <a:rPr sz="1200" b="1" i="0" spc="150">
-                <a:solidFill>
-                  <a:srgbClr val="FF9C52"/>
-                </a:solidFill>
-                <a:latin typeface="JetBrains Mono"/>
-              </a:rPr>
-              <a:t>CREATIVITY</a:t>
-            </a:r>
-          </a:p>
-        </p:txBody>
-      </p:sp>
-      <p:sp>
-        <p:nvSpPr>
-          <p:cNvPr id="16" name="TextBox 15"/>
-          <p:cNvSpPr txBox="1"/>
-          <p:nvPr/>
-        </p:nvSpPr>
-        <p:spPr>
-          <a:xfrm>
-            <a:off x="4974336" y="3749040"/>
-            <a:ext cx="2121408" cy="1828800"/>
-          </a:xfrm>
-          <a:prstGeom prst="rect">
-            <a:avLst/>
-          </a:prstGeom>
-          <a:noFill/>
-        </p:spPr>
-        <p:txBody>
-          <a:bodyPr wrap="square" lIns="0" rIns="0" tIns="0" bIns="0" anchor="t">
-            <a:spAutoFit/>
-          </a:bodyPr>
-          <a:lstStyle/>
-          <a:p>
-            <a:pPr algn="l"/>
-            <a:r>
-              <a:rPr sz="1150" b="0" i="0">
-                <a:solidFill>
-                  <a:srgbClr val="8A96AA"/>
-                </a:solidFill>
-                <a:latin typeface="Space Grotesk"/>
-              </a:rPr>
-              <a:t>Widest dimensional spread. Exploratory attention.</a:t>
-            </a:r>
-          </a:p>
-        </p:txBody>
-      </p:sp>
-      <p:sp>
-        <p:nvSpPr>
-          <p:cNvPr id="17" name="Rectangle 16"/>
-          <p:cNvSpPr/>
-          <p:nvPr/>
-        </p:nvSpPr>
-        <p:spPr>
-          <a:xfrm>
-            <a:off x="7187184" y="3291840"/>
-            <a:ext cx="2121408" cy="27432"/>
-          </a:xfrm>
-          <a:prstGeom prst="rect">
-            <a:avLst/>
-          </a:prstGeom>
-          <a:solidFill>
-            <a:srgbClr val="B466FF"/>
-          </a:solidFill>
-          <a:ln>
-            <a:noFill/>
-          </a:ln>
-        </p:spPr>
-        <p:style>
-          <a:lnRef idx="1">
-            <a:schemeClr val="accent1"/>
-          </a:lnRef>
-          <a:fillRef idx="3">
-            <a:schemeClr val="accent1"/>
-          </a:fillRef>
-          <a:effectRef idx="2">
-            <a:schemeClr val="accent1"/>
-          </a:effectRef>
-          <a:fontRef idx="minor">
-            <a:schemeClr val="lt1"/>
-          </a:fontRef>
-        </p:style>
-        <p:txBody>
-          <a:bodyPr rtlCol="0" anchor="ctr"/>
-          <a:lstStyle/>
-          <a:p>
-            <a:pPr algn="ctr"/>
-          </a:p>
-        </p:txBody>
-      </p:sp>
-      <p:sp>
-        <p:nvSpPr>
-          <p:cNvPr id="18" name="TextBox 17"/>
-          <p:cNvSpPr txBox="1"/>
-          <p:nvPr/>
-        </p:nvSpPr>
-        <p:spPr>
-          <a:xfrm>
-            <a:off x="7187184" y="3383280"/>
-            <a:ext cx="2121408" cy="292608"/>
-          </a:xfrm>
-          <a:prstGeom prst="rect">
-            <a:avLst/>
-          </a:prstGeom>
-          <a:noFill/>
-        </p:spPr>
-        <p:txBody>
-          <a:bodyPr wrap="square" lIns="0" rIns="0" tIns="0" bIns="0" anchor="t">
-            <a:spAutoFit/>
-          </a:bodyPr>
-          <a:lstStyle/>
-          <a:p>
-            <a:pPr algn="l"/>
-            <a:r>
-              <a:rPr sz="1200" b="1" i="0">
-                <a:solidFill>
-                  <a:srgbClr val="B466FF"/>
-                </a:solidFill>
-                <a:latin typeface="JetBrains Mono"/>
-              </a:rPr>
-              <a:t>04 / </a:t>
-            </a:r>
-            <a:r>
-              <a:rPr sz="1200" b="1" i="0" spc="150">
-                <a:solidFill>
-                  <a:srgbClr val="B466FF"/>
-                </a:solidFill>
-                <a:latin typeface="JetBrains Mono"/>
-              </a:rPr>
-              <a:t>PRECISION</a:t>
-            </a:r>
-          </a:p>
-        </p:txBody>
-      </p:sp>
-      <p:sp>
-        <p:nvSpPr>
-          <p:cNvPr id="19" name="TextBox 18"/>
-          <p:cNvSpPr txBox="1"/>
-          <p:nvPr/>
-        </p:nvSpPr>
-        <p:spPr>
-          <a:xfrm>
-            <a:off x="7187184" y="3749040"/>
-            <a:ext cx="2121408" cy="1828800"/>
-          </a:xfrm>
-          <a:prstGeom prst="rect">
-            <a:avLst/>
-          </a:prstGeom>
-          <a:noFill/>
-        </p:spPr>
-        <p:txBody>
-          <a:bodyPr wrap="square" lIns="0" rIns="0" tIns="0" bIns="0" anchor="t">
-            <a:spAutoFit/>
-          </a:bodyPr>
-          <a:lstStyle/>
-          <a:p>
-            <a:pPr algn="l"/>
-            <a:r>
-              <a:rPr sz="1150" b="0" i="0">
-                <a:solidFill>
-                  <a:srgbClr val="8A96AA"/>
-                </a:solidFill>
-                <a:latin typeface="Space Grotesk"/>
-              </a:rPr>
-              <a:t>Highest per-token focus. Moderate trajectory spread.</a:t>
-            </a:r>
-          </a:p>
-        </p:txBody>
-      </p:sp>
-      <p:sp>
-        <p:nvSpPr>
-          <p:cNvPr id="20" name="Rectangle 19"/>
-          <p:cNvSpPr/>
-          <p:nvPr/>
-        </p:nvSpPr>
-        <p:spPr>
-          <a:xfrm>
-            <a:off x="9400032" y="3291840"/>
-            <a:ext cx="2121408" cy="27432"/>
-          </a:xfrm>
-          <a:prstGeom prst="rect">
-            <a:avLst/>
-          </a:prstGeom>
-          <a:solidFill>
-            <a:srgbClr val="5A6478"/>
-          </a:solidFill>
-          <a:ln>
-            <a:noFill/>
-          </a:ln>
-        </p:spPr>
-        <p:style>
-          <a:lnRef idx="1">
-            <a:schemeClr val="accent1"/>
-          </a:lnRef>
-          <a:fillRef idx="3">
-            <a:schemeClr val="accent1"/>
-          </a:fillRef>
-          <a:effectRef idx="2">
-            <a:schemeClr val="accent1"/>
-          </a:effectRef>
-          <a:fontRef idx="minor">
-            <a:schemeClr val="lt1"/>
-          </a:fontRef>
-        </p:style>
-        <p:txBody>
-          <a:bodyPr rtlCol="0" anchor="ctr"/>
-          <a:lstStyle/>
-          <a:p>
-            <a:pPr algn="ctr"/>
-          </a:p>
-        </p:txBody>
-      </p:sp>
-      <p:sp>
-        <p:nvSpPr>
-          <p:cNvPr id="21" name="TextBox 20"/>
+          <p:cNvPr id="45" name="TextBox 44"/>
           <p:cNvSpPr txBox="1"/>
           <p:nvPr/>
         </p:nvSpPr>
@@ -9564,7 +10615,7 @@
             <a:r>
               <a:rPr sz="1200" b="1" i="0">
                 <a:solidFill>
-                  <a:srgbClr val="5A6478"/>
+                  <a:srgbClr val="FF9C52"/>
                 </a:solidFill>
                 <a:latin typeface="JetBrains Mono"/>
               </a:rPr>
@@ -9573,7 +10624,7 @@
             <a:r>
               <a:rPr sz="1200" b="1" i="0" spc="150">
                 <a:solidFill>
-                  <a:srgbClr val="5A6478"/>
+                  <a:srgbClr val="FF9C52"/>
                 </a:solidFill>
                 <a:latin typeface="JetBrains Mono"/>
               </a:rPr>
@@ -9584,7 +10635,7 @@
       </p:sp>
       <p:sp>
         <p:nvSpPr>
-          <p:cNvPr id="22" name="TextBox 21"/>
+          <p:cNvPr id="46" name="TextBox 45"/>
           <p:cNvSpPr txBox="1"/>
           <p:nvPr/>
         </p:nvSpPr>
@@ -9619,7 +10670,7 @@
       </p:sp>
       <p:sp>
         <p:nvSpPr>
-          <p:cNvPr id="23" name="TextBox 22"/>
+          <p:cNvPr id="47" name="TextBox 46"/>
           <p:cNvSpPr txBox="1"/>
           <p:nvPr/>
         </p:nvSpPr>
